--- a/presentations/isekai-opencode-overview.pptx
+++ b/presentations/isekai-opencode-overview.pptx
@@ -25,9 +25,10 @@
     <p:sldId id="273" r:id="rId19"/>
     <p:sldId id="274" r:id="rId20"/>
     <p:sldId id="275" r:id="rId21"/>
+    <p:sldId id="276" r:id="rId22"/>
   </p:sldIdLst>
   <p:notesMasterIdLst>
-    <p:notesMasterId r:id="rId22"/>
+    <p:notesMasterId r:id="rId23"/>
   </p:notesMasterIdLst>
   <p:sldSz cx="12192000" cy="6858000"/>
   <p:notesSz cx="6858000" cy="12192000"/>
@@ -1577,7 +1578,7 @@
           <a:p>
             <a:r>
               <a:rPr lang="en-US" dirty="0"/>
-              <a:t>Closing slide. Quote lifted directly from isekai.md's own opening.</a:t>
+              <a:t>The Minds and Bodies this deck describes are still read as they are (.opencode/ and .claude/ skills, commands and agents); what moved is the enforcement — from instructions the model follows to code the model cannot skip.</a:t>
             </a:r>
             <a:endParaRPr lang="en-US" dirty="0"/>
           </a:p>
@@ -1601,6 +1602,94 @@
             <a:fld id="{F7021451-1387-4CA6-816F-3879F97B5CBC}" type="slidenum">
               <a:rPr lang="en-US"/>
               <a:t>20</a:t>
+            </a:fld>
+            <a:endParaRPr lang="en-US"/>
+          </a:p>
+        </p:txBody>
+      </p:sp>
+    </p:spTree>
+    <p:extLst>
+      <p:ext uri="{BB962C8B-B14F-4D97-AF65-F5344CB8AC3E}">
+        <p14:creationId xmlns:p14="http://schemas.microsoft.com/office/powerpoint/2010/main" val="1024086991"/>
+      </p:ext>
+    </p:extLst>
+  </p:cSld>
+  <p:clrMapOvr>
+    <a:masterClrMapping/>
+  </p:clrMapOvr>
+</p:notes>
+</file>
+
+<file path=ppt/notesSlides/notesSlide21.xml><?xml version="1.0" encoding="utf-8"?>
+<p:notes xmlns:a="http://schemas.openxmlformats.org/drawingml/2006/main" xmlns:r="http://schemas.openxmlformats.org/officeDocument/2006/relationships" xmlns:p="http://schemas.openxmlformats.org/presentationml/2006/main">
+  <p:cSld>
+    <p:spTree>
+      <p:nvGrpSpPr>
+        <p:cNvPr id="1" name=""/>
+        <p:cNvGrpSpPr/>
+        <p:nvPr/>
+      </p:nvGrpSpPr>
+      <p:grpSpPr>
+        <a:xfrm>
+          <a:off x="0" y="0"/>
+          <a:ext cx="0" cy="0"/>
+          <a:chOff x="0" y="0"/>
+          <a:chExt cx="0" cy="0"/>
+        </a:xfrm>
+      </p:grpSpPr>
+      <p:sp>
+        <p:nvSpPr>
+          <p:cNvPr id="2" name="Slide Image Placeholder 1"/>
+          <p:cNvSpPr>
+            <a:spLocks noGrp="1" noRot="1" noChangeAspect="1"/>
+          </p:cNvSpPr>
+          <p:nvPr>
+            <p:ph type="sldImg"/>
+          </p:nvPr>
+        </p:nvSpPr>
+        <p:spPr/>
+      </p:sp>
+      <p:sp>
+        <p:nvSpPr>
+          <p:cNvPr id="3" name="Notes Placeholder 2"/>
+          <p:cNvSpPr>
+            <a:spLocks noGrp="1"/>
+          </p:cNvSpPr>
+          <p:nvPr>
+            <p:ph type="body" idx="1"/>
+          </p:nvPr>
+        </p:nvSpPr>
+        <p:spPr/>
+        <p:txBody>
+          <a:bodyPr/>
+          <a:lstStyle/>
+          <a:p>
+            <a:r>
+              <a:rPr lang="en-US" dirty="0"/>
+              <a:t>Closing slide. Quote lifted directly from isekai.md's own opening.</a:t>
+            </a:r>
+            <a:endParaRPr lang="en-US" dirty="0"/>
+          </a:p>
+        </p:txBody>
+      </p:sp>
+      <p:sp>
+        <p:nvSpPr>
+          <p:cNvPr id="4" name="Slide Number Placeholder 3"/>
+          <p:cNvSpPr>
+            <a:spLocks noGrp="1"/>
+          </p:cNvSpPr>
+          <p:nvPr>
+            <p:ph type="sldNum" sz="quarter" idx="10"/>
+          </p:nvPr>
+        </p:nvSpPr>
+        <p:spPr/>
+        <p:txBody>
+          <a:bodyPr/>
+          <a:lstStyle/>
+          <a:p>
+            <a:fld id="{F7021451-1387-4CA6-816F-3879F97B5CBC}" type="slidenum">
+              <a:rPr lang="en-US"/>
+              <a:t>21</a:t>
             </a:fld>
             <a:endParaRPr lang="en-US"/>
           </a:p>
@@ -13357,6 +13446,1827 @@
 <file path=ppt/slides/slide20.xml><?xml version="1.0" encoding="utf-8"?>
 <p:sld xmlns:a="http://schemas.openxmlformats.org/drawingml/2006/main" xmlns:r="http://schemas.openxmlformats.org/officeDocument/2006/relationships" xmlns:p="http://schemas.openxmlformats.org/presentationml/2006/main">
   <p:cSld name="Slide 20">
+    <p:spTree>
+      <p:nvGrpSpPr>
+        <p:cNvPr id="1" name=""/>
+        <p:cNvGrpSpPr/>
+        <p:nvPr/>
+      </p:nvGrpSpPr>
+      <p:grpSpPr>
+        <a:xfrm>
+          <a:off x="0" y="0"/>
+          <a:ext cx="0" cy="0"/>
+          <a:chOff x="0" y="0"/>
+          <a:chExt cx="0" cy="0"/>
+        </a:xfrm>
+      </p:grpSpPr>
+      <p:sp>
+        <p:nvSpPr>
+          <p:cNvPr id="2" name="Text 0"/>
+          <p:cNvSpPr txBox="1"/>
+          <p:nvPr/>
+        </p:nvSpPr>
+        <p:spPr>
+          <a:xfrm>
+            <a:off x="640080" y="502920"/>
+            <a:ext cx="10908792" cy="822960"/>
+          </a:xfrm>
+          <a:prstGeom prst="rect">
+            <a:avLst/>
+          </a:prstGeom>
+          <a:noFill/>
+          <a:ln/>
+        </p:spPr>
+        <p:txBody>
+          <a:bodyPr wrap="square" lIns="0" tIns="0" rIns="0" bIns="0" rtlCol="0" anchor="ctr"/>
+          <a:lstStyle/>
+          <a:p>
+            <a:pPr indent="0" marL="0">
+              <a:buNone/>
+            </a:pPr>
+            <a:r>
+              <a:rPr lang="en-US" sz="3000" b="1" dirty="0">
+                <a:solidFill>
+                  <a:srgbClr val="12182A"/>
+                </a:solidFill>
+                <a:latin typeface="Cambria" pitchFamily="34" charset="0"/>
+                <a:ea typeface="Cambria" pitchFamily="34" charset="-122"/>
+                <a:cs typeface="Cambria" pitchFamily="34" charset="-120"/>
+              </a:rPr>
+              <a:t>Then and now: the convention is a binary</a:t>
+            </a:r>
+            <a:endParaRPr lang="en-US" sz="3000" dirty="0"/>
+          </a:p>
+        </p:txBody>
+      </p:sp>
+      <p:sp>
+        <p:nvSpPr>
+          <p:cNvPr id="3" name="Text 1"/>
+          <p:cNvSpPr txBox="1"/>
+          <p:nvPr/>
+        </p:nvSpPr>
+        <p:spPr>
+          <a:xfrm>
+            <a:off x="640080" y="1234440"/>
+            <a:ext cx="10908792" cy="548640"/>
+          </a:xfrm>
+          <a:prstGeom prst="rect">
+            <a:avLst/>
+          </a:prstGeom>
+          <a:noFill/>
+          <a:ln/>
+        </p:spPr>
+        <p:txBody>
+          <a:bodyPr wrap="square" lIns="0" tIns="0" rIns="0" bIns="0" rtlCol="0" anchor="ctr"/>
+          <a:lstStyle/>
+          <a:p>
+            <a:pPr indent="0" marL="0">
+              <a:buNone/>
+            </a:pPr>
+            <a:r>
+              <a:rPr lang="en-US" sz="1400" dirty="0">
+                <a:solidFill>
+                  <a:srgbClr val="6B7A90"/>
+                </a:solidFill>
+                <a:latin typeface="Calibri" pitchFamily="34" charset="0"/>
+                <a:ea typeface="Calibri" pitchFamily="34" charset="-122"/>
+                <a:cs typeface="Calibri" pitchFamily="34" charset="-120"/>
+              </a:rPr>
+              <a:t>This deck tells the convention as it ran inside OpenCode and Claude Code. Since v0.1 every instrument is one Go binary — the law enforced in code. v0.3.0 is current.</a:t>
+            </a:r>
+            <a:endParaRPr lang="en-US" sz="1400" dirty="0"/>
+          </a:p>
+        </p:txBody>
+      </p:sp>
+      <p:graphicFrame>
+        <p:nvGraphicFramePr>
+          <p:cNvPr id="21" name="Table 0"/>
+          <p:cNvGraphicFramePr>
+            <a:graphicFrameLocks noGrp="1"/>
+          </p:cNvGraphicFramePr>
+          <p:nvPr>
+            <p:extLst>
+              <p:ext uri="{D42A27DB-BD31-4B8C-83A1-F6EECF244321}">
+                <p14:modId xmlns:p14="http://schemas.microsoft.com/office/powerpoint/2010/main" val="1579011935"/>
+              </p:ext>
+            </p:extLst>
+          </p:nvPr>
+        </p:nvGraphicFramePr>
+        <p:xfrm>
+          <a:off x="640080" y="1920240"/>
+          <a:ext cx="10908792" cy="914400"/>
+        </p:xfrm>
+        <a:graphic>
+          <a:graphicData uri="http://schemas.openxmlformats.org/drawingml/2006/table">
+            <a:tbl>
+              <a:tblPr/>
+              <a:tblGrid>
+                <a:gridCol w="2926080"/>
+                <a:gridCol w="3566160"/>
+                <a:gridCol w="4416552"/>
+              </a:tblGrid>
+              <a:tr h="502920">
+                <a:tc>
+                  <a:txBody>
+                    <a:bodyPr/>
+                    <a:lstStyle/>
+                    <a:p>
+                      <a:pPr indent="0" marL="0">
+                        <a:buNone/>
+                      </a:pPr>
+                      <a:r>
+                        <a:rPr lang="en-US" sz="1300" b="1" dirty="0">
+                          <a:solidFill>
+                            <a:srgbClr val="FFFFFF"/>
+                          </a:solidFill>
+                          <a:latin typeface="Calibri" pitchFamily="34" charset="0"/>
+                          <a:ea typeface="Calibri" pitchFamily="34" charset="-122"/>
+                          <a:cs typeface="Calibri" pitchFamily="34" charset="-120"/>
+                        </a:rPr>
+                        <a:t>the convention</a:t>
+                      </a:r>
+                      <a:endParaRPr lang="en-US" sz="1300" dirty="0">
+                        <a:latin typeface="Calibri" charset="0"/>
+                        <a:ea typeface="Calibri" charset="0"/>
+                        <a:cs typeface="Calibri" charset="0"/>
+                      </a:endParaRPr>
+                    </a:p>
+                  </a:txBody>
+                  <a:tcPr marL="73152" marR="73152" marT="73152" marB="73152" anchor="ctr">
+                    <a:lnL w="9525" cap="flat" cmpd="sng" algn="ctr">
+                      <a:solidFill>
+                        <a:srgbClr val="DCE3EC"/>
+                      </a:solidFill>
+                      <a:prstDash val="solid"/>
+                      <a:round/>
+                      <a:headEnd type="none" w="med" len="med"/>
+                      <a:tailEnd type="none" w="med" len="med"/>
+                    </a:lnL>
+                    <a:lnR w="9525" cap="flat" cmpd="sng" algn="ctr">
+                      <a:solidFill>
+                        <a:srgbClr val="DCE3EC"/>
+                      </a:solidFill>
+                      <a:prstDash val="solid"/>
+                      <a:round/>
+                      <a:headEnd type="none" w="med" len="med"/>
+                      <a:tailEnd type="none" w="med" len="med"/>
+                    </a:lnR>
+                    <a:lnT w="9525" cap="flat" cmpd="sng" algn="ctr">
+                      <a:solidFill>
+                        <a:srgbClr val="DCE3EC"/>
+                      </a:solidFill>
+                      <a:prstDash val="solid"/>
+                      <a:round/>
+                      <a:headEnd type="none" w="med" len="med"/>
+                      <a:tailEnd type="none" w="med" len="med"/>
+                    </a:lnT>
+                    <a:lnB w="9525" cap="flat" cmpd="sng" algn="ctr">
+                      <a:solidFill>
+                        <a:srgbClr val="DCE3EC"/>
+                      </a:solidFill>
+                      <a:prstDash val="solid"/>
+                      <a:round/>
+                      <a:headEnd type="none" w="med" len="med"/>
+                      <a:tailEnd type="none" w="med" len="med"/>
+                    </a:lnB>
+                    <a:solidFill>
+                      <a:srgbClr val="12182A"/>
+                    </a:solidFill>
+                  </a:tcPr>
+                </a:tc>
+                <a:tc>
+                  <a:txBody>
+                    <a:bodyPr/>
+                    <a:lstStyle/>
+                    <a:p>
+                      <a:pPr indent="0" marL="0">
+                        <a:buNone/>
+                      </a:pPr>
+                      <a:r>
+                        <a:rPr lang="en-US" sz="1300" b="1" dirty="0">
+                          <a:solidFill>
+                            <a:srgbClr val="FFFFFF"/>
+                          </a:solidFill>
+                          <a:latin typeface="Calibri" pitchFamily="34" charset="0"/>
+                          <a:ea typeface="Calibri" pitchFamily="34" charset="-122"/>
+                          <a:cs typeface="Calibri" pitchFamily="34" charset="-120"/>
+                        </a:rPr>
+                        <a:t>isekai v0.3.0</a:t>
+                      </a:r>
+                      <a:endParaRPr lang="en-US" sz="1300" dirty="0">
+                        <a:latin typeface="Calibri" charset="0"/>
+                        <a:ea typeface="Calibri" charset="0"/>
+                        <a:cs typeface="Calibri" charset="0"/>
+                      </a:endParaRPr>
+                    </a:p>
+                  </a:txBody>
+                  <a:tcPr marL="73152" marR="73152" marT="73152" marB="73152" anchor="ctr">
+                    <a:lnL w="9525" cap="flat" cmpd="sng" algn="ctr">
+                      <a:solidFill>
+                        <a:srgbClr val="DCE3EC"/>
+                      </a:solidFill>
+                      <a:prstDash val="solid"/>
+                      <a:round/>
+                      <a:headEnd type="none" w="med" len="med"/>
+                      <a:tailEnd type="none" w="med" len="med"/>
+                    </a:lnL>
+                    <a:lnR w="9525" cap="flat" cmpd="sng" algn="ctr">
+                      <a:solidFill>
+                        <a:srgbClr val="DCE3EC"/>
+                      </a:solidFill>
+                      <a:prstDash val="solid"/>
+                      <a:round/>
+                      <a:headEnd type="none" w="med" len="med"/>
+                      <a:tailEnd type="none" w="med" len="med"/>
+                    </a:lnR>
+                    <a:lnT w="9525" cap="flat" cmpd="sng" algn="ctr">
+                      <a:solidFill>
+                        <a:srgbClr val="DCE3EC"/>
+                      </a:solidFill>
+                      <a:prstDash val="solid"/>
+                      <a:round/>
+                      <a:headEnd type="none" w="med" len="med"/>
+                      <a:tailEnd type="none" w="med" len="med"/>
+                    </a:lnT>
+                    <a:lnB w="9525" cap="flat" cmpd="sng" algn="ctr">
+                      <a:solidFill>
+                        <a:srgbClr val="DCE3EC"/>
+                      </a:solidFill>
+                      <a:prstDash val="solid"/>
+                      <a:round/>
+                      <a:headEnd type="none" w="med" len="med"/>
+                      <a:tailEnd type="none" w="med" len="med"/>
+                    </a:lnB>
+                    <a:solidFill>
+                      <a:srgbClr val="12182A"/>
+                    </a:solidFill>
+                  </a:tcPr>
+                </a:tc>
+                <a:tc>
+                  <a:txBody>
+                    <a:bodyPr/>
+                    <a:lstStyle/>
+                    <a:p>
+                      <a:pPr indent="0" marL="0">
+                        <a:buNone/>
+                      </a:pPr>
+                      <a:r>
+                        <a:rPr lang="en-US" sz="1300" b="1" dirty="0">
+                          <a:solidFill>
+                            <a:srgbClr val="FFFFFF"/>
+                          </a:solidFill>
+                          <a:latin typeface="Calibri" pitchFamily="34" charset="0"/>
+                          <a:ea typeface="Calibri" pitchFamily="34" charset="-122"/>
+                          <a:cs typeface="Calibri" pitchFamily="34" charset="-120"/>
+                        </a:rPr>
+                        <a:t>what changed</a:t>
+                      </a:r>
+                      <a:endParaRPr lang="en-US" sz="1300" dirty="0">
+                        <a:latin typeface="Calibri" charset="0"/>
+                        <a:ea typeface="Calibri" charset="0"/>
+                        <a:cs typeface="Calibri" charset="0"/>
+                      </a:endParaRPr>
+                    </a:p>
+                  </a:txBody>
+                  <a:tcPr marL="73152" marR="73152" marT="73152" marB="73152" anchor="ctr">
+                    <a:lnL w="9525" cap="flat" cmpd="sng" algn="ctr">
+                      <a:solidFill>
+                        <a:srgbClr val="DCE3EC"/>
+                      </a:solidFill>
+                      <a:prstDash val="solid"/>
+                      <a:round/>
+                      <a:headEnd type="none" w="med" len="med"/>
+                      <a:tailEnd type="none" w="med" len="med"/>
+                    </a:lnL>
+                    <a:lnR w="9525" cap="flat" cmpd="sng" algn="ctr">
+                      <a:solidFill>
+                        <a:srgbClr val="DCE3EC"/>
+                      </a:solidFill>
+                      <a:prstDash val="solid"/>
+                      <a:round/>
+                      <a:headEnd type="none" w="med" len="med"/>
+                      <a:tailEnd type="none" w="med" len="med"/>
+                    </a:lnR>
+                    <a:lnT w="9525" cap="flat" cmpd="sng" algn="ctr">
+                      <a:solidFill>
+                        <a:srgbClr val="DCE3EC"/>
+                      </a:solidFill>
+                      <a:prstDash val="solid"/>
+                      <a:round/>
+                      <a:headEnd type="none" w="med" len="med"/>
+                      <a:tailEnd type="none" w="med" len="med"/>
+                    </a:lnT>
+                    <a:lnB w="9525" cap="flat" cmpd="sng" algn="ctr">
+                      <a:solidFill>
+                        <a:srgbClr val="DCE3EC"/>
+                      </a:solidFill>
+                      <a:prstDash val="solid"/>
+                      <a:round/>
+                      <a:headEnd type="none" w="med" len="med"/>
+                      <a:tailEnd type="none" w="med" len="med"/>
+                    </a:lnB>
+                    <a:solidFill>
+                      <a:srgbClr val="12182A"/>
+                    </a:solidFill>
+                  </a:tcPr>
+                </a:tc>
+              </a:tr>
+              <a:tr h="502920">
+                <a:tc>
+                  <a:txBody>
+                    <a:bodyPr/>
+                    <a:lstStyle/>
+                    <a:p>
+                      <a:pPr indent="0" marL="0">
+                        <a:buNone/>
+                      </a:pPr>
+                      <a:r>
+                        <a:rPr lang="en-US" sz="1200" dirty="0">
+                          <a:solidFill>
+                            <a:srgbClr val="12182A"/>
+                          </a:solidFill>
+                          <a:latin typeface="Courier New" pitchFamily="34" charset="0"/>
+                          <a:ea typeface="Courier New" pitchFamily="34" charset="-122"/>
+                          <a:cs typeface="Courier New" pitchFamily="34" charset="-120"/>
+                        </a:rPr>
+                        <a:t>/isekai, /genesis</a:t>
+                      </a:r>
+                      <a:endParaRPr lang="en-US" sz="1200" dirty="0">
+                        <a:latin typeface="Courier New" charset="0"/>
+                        <a:ea typeface="Courier New" charset="0"/>
+                        <a:cs typeface="Courier New" charset="0"/>
+                      </a:endParaRPr>
+                    </a:p>
+                  </a:txBody>
+                  <a:tcPr marL="73152" marR="73152" marT="73152" marB="73152" anchor="ctr">
+                    <a:lnL w="9525" cap="flat" cmpd="sng" algn="ctr">
+                      <a:solidFill>
+                        <a:srgbClr val="DCE3EC"/>
+                      </a:solidFill>
+                      <a:prstDash val="solid"/>
+                      <a:round/>
+                      <a:headEnd type="none" w="med" len="med"/>
+                      <a:tailEnd type="none" w="med" len="med"/>
+                    </a:lnL>
+                    <a:lnR w="9525" cap="flat" cmpd="sng" algn="ctr">
+                      <a:solidFill>
+                        <a:srgbClr val="DCE3EC"/>
+                      </a:solidFill>
+                      <a:prstDash val="solid"/>
+                      <a:round/>
+                      <a:headEnd type="none" w="med" len="med"/>
+                      <a:tailEnd type="none" w="med" len="med"/>
+                    </a:lnR>
+                    <a:lnT w="9525" cap="flat" cmpd="sng" algn="ctr">
+                      <a:solidFill>
+                        <a:srgbClr val="DCE3EC"/>
+                      </a:solidFill>
+                      <a:prstDash val="solid"/>
+                      <a:round/>
+                      <a:headEnd type="none" w="med" len="med"/>
+                      <a:tailEnd type="none" w="med" len="med"/>
+                    </a:lnT>
+                    <a:lnB w="9525" cap="flat" cmpd="sng" algn="ctr">
+                      <a:solidFill>
+                        <a:srgbClr val="DCE3EC"/>
+                      </a:solidFill>
+                      <a:prstDash val="solid"/>
+                      <a:round/>
+                      <a:headEnd type="none" w="med" len="med"/>
+                      <a:tailEnd type="none" w="med" len="med"/>
+                    </a:lnB>
+                    <a:solidFill>
+                      <a:srgbClr val="FFFFFF"/>
+                    </a:solidFill>
+                  </a:tcPr>
+                </a:tc>
+                <a:tc>
+                  <a:txBody>
+                    <a:bodyPr/>
+                    <a:lstStyle/>
+                    <a:p>
+                      <a:pPr indent="0" marL="0">
+                        <a:buNone/>
+                      </a:pPr>
+                      <a:r>
+                        <a:rPr lang="en-US" sz="1200" b="1" dirty="0">
+                          <a:solidFill>
+                            <a:srgbClr val="2695BD"/>
+                          </a:solidFill>
+                          <a:latin typeface="Courier New" pitchFamily="34" charset="0"/>
+                          <a:ea typeface="Courier New" pitchFamily="34" charset="-122"/>
+                          <a:cs typeface="Courier New" pitchFamily="34" charset="-120"/>
+                        </a:rPr>
+                        <a:t>isekai init [--level light|medium|complex]</a:t>
+                      </a:r>
+                      <a:endParaRPr lang="en-US" sz="1200" dirty="0">
+                        <a:latin typeface="Courier New" charset="0"/>
+                        <a:ea typeface="Courier New" charset="0"/>
+                        <a:cs typeface="Courier New" charset="0"/>
+                      </a:endParaRPr>
+                    </a:p>
+                  </a:txBody>
+                  <a:tcPr marL="73152" marR="73152" marT="73152" marB="73152" anchor="ctr">
+                    <a:lnL w="9525" cap="flat" cmpd="sng" algn="ctr">
+                      <a:solidFill>
+                        <a:srgbClr val="DCE3EC"/>
+                      </a:solidFill>
+                      <a:prstDash val="solid"/>
+                      <a:round/>
+                      <a:headEnd type="none" w="med" len="med"/>
+                      <a:tailEnd type="none" w="med" len="med"/>
+                    </a:lnL>
+                    <a:lnR w="9525" cap="flat" cmpd="sng" algn="ctr">
+                      <a:solidFill>
+                        <a:srgbClr val="DCE3EC"/>
+                      </a:solidFill>
+                      <a:prstDash val="solid"/>
+                      <a:round/>
+                      <a:headEnd type="none" w="med" len="med"/>
+                      <a:tailEnd type="none" w="med" len="med"/>
+                    </a:lnR>
+                    <a:lnT w="9525" cap="flat" cmpd="sng" algn="ctr">
+                      <a:solidFill>
+                        <a:srgbClr val="DCE3EC"/>
+                      </a:solidFill>
+                      <a:prstDash val="solid"/>
+                      <a:round/>
+                      <a:headEnd type="none" w="med" len="med"/>
+                      <a:tailEnd type="none" w="med" len="med"/>
+                    </a:lnT>
+                    <a:lnB w="9525" cap="flat" cmpd="sng" algn="ctr">
+                      <a:solidFill>
+                        <a:srgbClr val="DCE3EC"/>
+                      </a:solidFill>
+                      <a:prstDash val="solid"/>
+                      <a:round/>
+                      <a:headEnd type="none" w="med" len="med"/>
+                      <a:tailEnd type="none" w="med" len="med"/>
+                    </a:lnB>
+                    <a:solidFill>
+                      <a:srgbClr val="FFFFFF"/>
+                    </a:solidFill>
+                  </a:tcPr>
+                </a:tc>
+                <a:tc>
+                  <a:txBody>
+                    <a:bodyPr/>
+                    <a:lstStyle/>
+                    <a:p>
+                      <a:pPr indent="0" marL="0">
+                        <a:buNone/>
+                      </a:pPr>
+                      <a:r>
+                        <a:rPr lang="en-US" sz="1200" dirty="0">
+                          <a:solidFill>
+                            <a:srgbClr val="3B4656"/>
+                          </a:solidFill>
+                          <a:latin typeface="Calibri" pitchFamily="34" charset="0"/>
+                          <a:ea typeface="Calibri" pitchFamily="34" charset="-122"/>
+                          <a:cs typeface="Calibri" pitchFamily="34" charset="-120"/>
+                        </a:rPr>
+                        <a:t>founds the world; medium reads the tree, complex asks the model</a:t>
+                      </a:r>
+                      <a:endParaRPr lang="en-US" sz="1200" dirty="0">
+                        <a:latin typeface="Calibri" charset="0"/>
+                        <a:ea typeface="Calibri" charset="0"/>
+                        <a:cs typeface="Calibri" charset="0"/>
+                      </a:endParaRPr>
+                    </a:p>
+                  </a:txBody>
+                  <a:tcPr marL="73152" marR="73152" marT="73152" marB="73152" anchor="ctr">
+                    <a:lnL w="9525" cap="flat" cmpd="sng" algn="ctr">
+                      <a:solidFill>
+                        <a:srgbClr val="DCE3EC"/>
+                      </a:solidFill>
+                      <a:prstDash val="solid"/>
+                      <a:round/>
+                      <a:headEnd type="none" w="med" len="med"/>
+                      <a:tailEnd type="none" w="med" len="med"/>
+                    </a:lnL>
+                    <a:lnR w="9525" cap="flat" cmpd="sng" algn="ctr">
+                      <a:solidFill>
+                        <a:srgbClr val="DCE3EC"/>
+                      </a:solidFill>
+                      <a:prstDash val="solid"/>
+                      <a:round/>
+                      <a:headEnd type="none" w="med" len="med"/>
+                      <a:tailEnd type="none" w="med" len="med"/>
+                    </a:lnR>
+                    <a:lnT w="9525" cap="flat" cmpd="sng" algn="ctr">
+                      <a:solidFill>
+                        <a:srgbClr val="DCE3EC"/>
+                      </a:solidFill>
+                      <a:prstDash val="solid"/>
+                      <a:round/>
+                      <a:headEnd type="none" w="med" len="med"/>
+                      <a:tailEnd type="none" w="med" len="med"/>
+                    </a:lnT>
+                    <a:lnB w="9525" cap="flat" cmpd="sng" algn="ctr">
+                      <a:solidFill>
+                        <a:srgbClr val="DCE3EC"/>
+                      </a:solidFill>
+                      <a:prstDash val="solid"/>
+                      <a:round/>
+                      <a:headEnd type="none" w="med" len="med"/>
+                      <a:tailEnd type="none" w="med" len="med"/>
+                    </a:lnB>
+                    <a:solidFill>
+                      <a:srgbClr val="FFFFFF"/>
+                    </a:solidFill>
+                  </a:tcPr>
+                </a:tc>
+              </a:tr>
+              <a:tr h="502920">
+                <a:tc>
+                  <a:txBody>
+                    <a:bodyPr/>
+                    <a:lstStyle/>
+                    <a:p>
+                      <a:pPr indent="0" marL="0">
+                        <a:buNone/>
+                      </a:pPr>
+                      <a:r>
+                        <a:rPr lang="en-US" sz="1200" dirty="0">
+                          <a:solidFill>
+                            <a:srgbClr val="12182A"/>
+                          </a:solidFill>
+                          <a:latin typeface="Courier New" pitchFamily="34" charset="0"/>
+                          <a:ea typeface="Courier New" pitchFamily="34" charset="-122"/>
+                          <a:cs typeface="Courier New" pitchFamily="34" charset="-120"/>
+                        </a:rPr>
+                        <a:t>memory.js</a:t>
+                      </a:r>
+                      <a:endParaRPr lang="en-US" sz="1200" dirty="0">
+                        <a:latin typeface="Courier New" charset="0"/>
+                        <a:ea typeface="Courier New" charset="0"/>
+                        <a:cs typeface="Courier New" charset="0"/>
+                      </a:endParaRPr>
+                    </a:p>
+                  </a:txBody>
+                  <a:tcPr marL="73152" marR="73152" marT="73152" marB="73152" anchor="ctr">
+                    <a:lnL w="9525" cap="flat" cmpd="sng" algn="ctr">
+                      <a:solidFill>
+                        <a:srgbClr val="DCE3EC"/>
+                      </a:solidFill>
+                      <a:prstDash val="solid"/>
+                      <a:round/>
+                      <a:headEnd type="none" w="med" len="med"/>
+                      <a:tailEnd type="none" w="med" len="med"/>
+                    </a:lnL>
+                    <a:lnR w="9525" cap="flat" cmpd="sng" algn="ctr">
+                      <a:solidFill>
+                        <a:srgbClr val="DCE3EC"/>
+                      </a:solidFill>
+                      <a:prstDash val="solid"/>
+                      <a:round/>
+                      <a:headEnd type="none" w="med" len="med"/>
+                      <a:tailEnd type="none" w="med" len="med"/>
+                    </a:lnR>
+                    <a:lnT w="9525" cap="flat" cmpd="sng" algn="ctr">
+                      <a:solidFill>
+                        <a:srgbClr val="DCE3EC"/>
+                      </a:solidFill>
+                      <a:prstDash val="solid"/>
+                      <a:round/>
+                      <a:headEnd type="none" w="med" len="med"/>
+                      <a:tailEnd type="none" w="med" len="med"/>
+                    </a:lnT>
+                    <a:lnB w="9525" cap="flat" cmpd="sng" algn="ctr">
+                      <a:solidFill>
+                        <a:srgbClr val="DCE3EC"/>
+                      </a:solidFill>
+                      <a:prstDash val="solid"/>
+                      <a:round/>
+                      <a:headEnd type="none" w="med" len="med"/>
+                      <a:tailEnd type="none" w="med" len="med"/>
+                    </a:lnB>
+                    <a:solidFill>
+                      <a:srgbClr val="FFFFFF"/>
+                    </a:solidFill>
+                  </a:tcPr>
+                </a:tc>
+                <a:tc>
+                  <a:txBody>
+                    <a:bodyPr/>
+                    <a:lstStyle/>
+                    <a:p>
+                      <a:pPr indent="0" marL="0">
+                        <a:buNone/>
+                      </a:pPr>
+                      <a:r>
+                        <a:rPr lang="en-US" sz="1200" b="1" dirty="0">
+                          <a:solidFill>
+                            <a:srgbClr val="2695BD"/>
+                          </a:solidFill>
+                          <a:latin typeface="Courier New" pitchFamily="34" charset="0"/>
+                          <a:ea typeface="Courier New" pitchFamily="34" charset="-122"/>
+                          <a:cs typeface="Courier New" pitchFamily="34" charset="-120"/>
+                        </a:rPr>
+                        <a:t>isekai memory</a:t>
+                      </a:r>
+                      <a:endParaRPr lang="en-US" sz="1200" dirty="0">
+                        <a:latin typeface="Courier New" charset="0"/>
+                        <a:ea typeface="Courier New" charset="0"/>
+                        <a:cs typeface="Courier New" charset="0"/>
+                      </a:endParaRPr>
+                    </a:p>
+                  </a:txBody>
+                  <a:tcPr marL="73152" marR="73152" marT="73152" marB="73152" anchor="ctr">
+                    <a:lnL w="9525" cap="flat" cmpd="sng" algn="ctr">
+                      <a:solidFill>
+                        <a:srgbClr val="DCE3EC"/>
+                      </a:solidFill>
+                      <a:prstDash val="solid"/>
+                      <a:round/>
+                      <a:headEnd type="none" w="med" len="med"/>
+                      <a:tailEnd type="none" w="med" len="med"/>
+                    </a:lnL>
+                    <a:lnR w="9525" cap="flat" cmpd="sng" algn="ctr">
+                      <a:solidFill>
+                        <a:srgbClr val="DCE3EC"/>
+                      </a:solidFill>
+                      <a:prstDash val="solid"/>
+                      <a:round/>
+                      <a:headEnd type="none" w="med" len="med"/>
+                      <a:tailEnd type="none" w="med" len="med"/>
+                    </a:lnR>
+                    <a:lnT w="9525" cap="flat" cmpd="sng" algn="ctr">
+                      <a:solidFill>
+                        <a:srgbClr val="DCE3EC"/>
+                      </a:solidFill>
+                      <a:prstDash val="solid"/>
+                      <a:round/>
+                      <a:headEnd type="none" w="med" len="med"/>
+                      <a:tailEnd type="none" w="med" len="med"/>
+                    </a:lnT>
+                    <a:lnB w="9525" cap="flat" cmpd="sng" algn="ctr">
+                      <a:solidFill>
+                        <a:srgbClr val="DCE3EC"/>
+                      </a:solidFill>
+                      <a:prstDash val="solid"/>
+                      <a:round/>
+                      <a:headEnd type="none" w="med" len="med"/>
+                      <a:tailEnd type="none" w="med" len="med"/>
+                    </a:lnB>
+                    <a:solidFill>
+                      <a:srgbClr val="FFFFFF"/>
+                    </a:solidFill>
+                  </a:tcPr>
+                </a:tc>
+                <a:tc>
+                  <a:txBody>
+                    <a:bodyPr/>
+                    <a:lstStyle/>
+                    <a:p>
+                      <a:pPr indent="0" marL="0">
+                        <a:buNone/>
+                      </a:pPr>
+                      <a:r>
+                        <a:rPr lang="en-US" sz="1200" dirty="0">
+                          <a:solidFill>
+                            <a:srgbClr val="3B4656"/>
+                          </a:solidFill>
+                          <a:latin typeface="Calibri" pitchFamily="34" charset="0"/>
+                          <a:ea typeface="Calibri" pitchFamily="34" charset="-122"/>
+                          <a:cs typeface="Calibri" pitchFamily="34" charset="-120"/>
+                        </a:rPr>
+                        <a:t>the same tiers, native in the loop: recall before a step, remember after</a:t>
+                      </a:r>
+                      <a:endParaRPr lang="en-US" sz="1200" dirty="0">
+                        <a:latin typeface="Calibri" charset="0"/>
+                        <a:ea typeface="Calibri" charset="0"/>
+                        <a:cs typeface="Calibri" charset="0"/>
+                      </a:endParaRPr>
+                    </a:p>
+                  </a:txBody>
+                  <a:tcPr marL="73152" marR="73152" marT="73152" marB="73152" anchor="ctr">
+                    <a:lnL w="9525" cap="flat" cmpd="sng" algn="ctr">
+                      <a:solidFill>
+                        <a:srgbClr val="DCE3EC"/>
+                      </a:solidFill>
+                      <a:prstDash val="solid"/>
+                      <a:round/>
+                      <a:headEnd type="none" w="med" len="med"/>
+                      <a:tailEnd type="none" w="med" len="med"/>
+                    </a:lnL>
+                    <a:lnR w="9525" cap="flat" cmpd="sng" algn="ctr">
+                      <a:solidFill>
+                        <a:srgbClr val="DCE3EC"/>
+                      </a:solidFill>
+                      <a:prstDash val="solid"/>
+                      <a:round/>
+                      <a:headEnd type="none" w="med" len="med"/>
+                      <a:tailEnd type="none" w="med" len="med"/>
+                    </a:lnR>
+                    <a:lnT w="9525" cap="flat" cmpd="sng" algn="ctr">
+                      <a:solidFill>
+                        <a:srgbClr val="DCE3EC"/>
+                      </a:solidFill>
+                      <a:prstDash val="solid"/>
+                      <a:round/>
+                      <a:headEnd type="none" w="med" len="med"/>
+                      <a:tailEnd type="none" w="med" len="med"/>
+                    </a:lnT>
+                    <a:lnB w="9525" cap="flat" cmpd="sng" algn="ctr">
+                      <a:solidFill>
+                        <a:srgbClr val="DCE3EC"/>
+                      </a:solidFill>
+                      <a:prstDash val="solid"/>
+                      <a:round/>
+                      <a:headEnd type="none" w="med" len="med"/>
+                      <a:tailEnd type="none" w="med" len="med"/>
+                    </a:lnB>
+                    <a:solidFill>
+                      <a:srgbClr val="FFFFFF"/>
+                    </a:solidFill>
+                  </a:tcPr>
+                </a:tc>
+              </a:tr>
+              <a:tr h="502920">
+                <a:tc>
+                  <a:txBody>
+                    <a:bodyPr/>
+                    <a:lstStyle/>
+                    <a:p>
+                      <a:pPr indent="0" marL="0">
+                        <a:buNone/>
+                      </a:pPr>
+                      <a:r>
+                        <a:rPr lang="en-US" sz="1200" dirty="0">
+                          <a:solidFill>
+                            <a:srgbClr val="12182A"/>
+                          </a:solidFill>
+                          <a:latin typeface="Courier New" pitchFamily="34" charset="0"/>
+                          <a:ea typeface="Courier New" pitchFamily="34" charset="-122"/>
+                          <a:cs typeface="Courier New" pitchFamily="34" charset="-120"/>
+                        </a:rPr>
+                        <a:t>toolbox.js</a:t>
+                      </a:r>
+                      <a:endParaRPr lang="en-US" sz="1200" dirty="0">
+                        <a:latin typeface="Courier New" charset="0"/>
+                        <a:ea typeface="Courier New" charset="0"/>
+                        <a:cs typeface="Courier New" charset="0"/>
+                      </a:endParaRPr>
+                    </a:p>
+                  </a:txBody>
+                  <a:tcPr marL="73152" marR="73152" marT="73152" marB="73152" anchor="ctr">
+                    <a:lnL w="9525" cap="flat" cmpd="sng" algn="ctr">
+                      <a:solidFill>
+                        <a:srgbClr val="DCE3EC"/>
+                      </a:solidFill>
+                      <a:prstDash val="solid"/>
+                      <a:round/>
+                      <a:headEnd type="none" w="med" len="med"/>
+                      <a:tailEnd type="none" w="med" len="med"/>
+                    </a:lnL>
+                    <a:lnR w="9525" cap="flat" cmpd="sng" algn="ctr">
+                      <a:solidFill>
+                        <a:srgbClr val="DCE3EC"/>
+                      </a:solidFill>
+                      <a:prstDash val="solid"/>
+                      <a:round/>
+                      <a:headEnd type="none" w="med" len="med"/>
+                      <a:tailEnd type="none" w="med" len="med"/>
+                    </a:lnR>
+                    <a:lnT w="9525" cap="flat" cmpd="sng" algn="ctr">
+                      <a:solidFill>
+                        <a:srgbClr val="DCE3EC"/>
+                      </a:solidFill>
+                      <a:prstDash val="solid"/>
+                      <a:round/>
+                      <a:headEnd type="none" w="med" len="med"/>
+                      <a:tailEnd type="none" w="med" len="med"/>
+                    </a:lnT>
+                    <a:lnB w="9525" cap="flat" cmpd="sng" algn="ctr">
+                      <a:solidFill>
+                        <a:srgbClr val="DCE3EC"/>
+                      </a:solidFill>
+                      <a:prstDash val="solid"/>
+                      <a:round/>
+                      <a:headEnd type="none" w="med" len="med"/>
+                      <a:tailEnd type="none" w="med" len="med"/>
+                    </a:lnB>
+                    <a:solidFill>
+                      <a:srgbClr val="FFFFFF"/>
+                    </a:solidFill>
+                  </a:tcPr>
+                </a:tc>
+                <a:tc>
+                  <a:txBody>
+                    <a:bodyPr/>
+                    <a:lstStyle/>
+                    <a:p>
+                      <a:pPr indent="0" marL="0">
+                        <a:buNone/>
+                      </a:pPr>
+                      <a:r>
+                        <a:rPr lang="en-US" sz="1200" b="1" dirty="0">
+                          <a:solidFill>
+                            <a:srgbClr val="2695BD"/>
+                          </a:solidFill>
+                          <a:latin typeface="Courier New" pitchFamily="34" charset="0"/>
+                          <a:ea typeface="Courier New" pitchFamily="34" charset="-122"/>
+                          <a:cs typeface="Courier New" pitchFamily="34" charset="-120"/>
+                        </a:rPr>
+                        <a:t>isekai toolbox</a:t>
+                      </a:r>
+                      <a:endParaRPr lang="en-US" sz="1200" dirty="0">
+                        <a:latin typeface="Courier New" charset="0"/>
+                        <a:ea typeface="Courier New" charset="0"/>
+                        <a:cs typeface="Courier New" charset="0"/>
+                      </a:endParaRPr>
+                    </a:p>
+                  </a:txBody>
+                  <a:tcPr marL="73152" marR="73152" marT="73152" marB="73152" anchor="ctr">
+                    <a:lnL w="9525" cap="flat" cmpd="sng" algn="ctr">
+                      <a:solidFill>
+                        <a:srgbClr val="DCE3EC"/>
+                      </a:solidFill>
+                      <a:prstDash val="solid"/>
+                      <a:round/>
+                      <a:headEnd type="none" w="med" len="med"/>
+                      <a:tailEnd type="none" w="med" len="med"/>
+                    </a:lnL>
+                    <a:lnR w="9525" cap="flat" cmpd="sng" algn="ctr">
+                      <a:solidFill>
+                        <a:srgbClr val="DCE3EC"/>
+                      </a:solidFill>
+                      <a:prstDash val="solid"/>
+                      <a:round/>
+                      <a:headEnd type="none" w="med" len="med"/>
+                      <a:tailEnd type="none" w="med" len="med"/>
+                    </a:lnR>
+                    <a:lnT w="9525" cap="flat" cmpd="sng" algn="ctr">
+                      <a:solidFill>
+                        <a:srgbClr val="DCE3EC"/>
+                      </a:solidFill>
+                      <a:prstDash val="solid"/>
+                      <a:round/>
+                      <a:headEnd type="none" w="med" len="med"/>
+                      <a:tailEnd type="none" w="med" len="med"/>
+                    </a:lnT>
+                    <a:lnB w="9525" cap="flat" cmpd="sng" algn="ctr">
+                      <a:solidFill>
+                        <a:srgbClr val="DCE3EC"/>
+                      </a:solidFill>
+                      <a:prstDash val="solid"/>
+                      <a:round/>
+                      <a:headEnd type="none" w="med" len="med"/>
+                      <a:tailEnd type="none" w="med" len="med"/>
+                    </a:lnB>
+                    <a:solidFill>
+                      <a:srgbClr val="FFFFFF"/>
+                    </a:solidFill>
+                  </a:tcPr>
+                </a:tc>
+                <a:tc>
+                  <a:txBody>
+                    <a:bodyPr/>
+                    <a:lstStyle/>
+                    <a:p>
+                      <a:pPr indent="0" marL="0">
+                        <a:buNone/>
+                      </a:pPr>
+                      <a:r>
+                        <a:rPr lang="en-US" sz="1200" dirty="0">
+                          <a:solidFill>
+                            <a:srgbClr val="3B4656"/>
+                          </a:solidFill>
+                          <a:latin typeface="Calibri" pitchFamily="34" charset="0"/>
+                          <a:ea typeface="Calibri" pitchFamily="34" charset="-122"/>
+                          <a:cs typeface="Calibri" pitchFamily="34" charset="-120"/>
+                        </a:rPr>
+                        <a:t>the same two levels, one budget, in every turn's prompt</a:t>
+                      </a:r>
+                      <a:endParaRPr lang="en-US" sz="1200" dirty="0">
+                        <a:latin typeface="Calibri" charset="0"/>
+                        <a:ea typeface="Calibri" charset="0"/>
+                        <a:cs typeface="Calibri" charset="0"/>
+                      </a:endParaRPr>
+                    </a:p>
+                  </a:txBody>
+                  <a:tcPr marL="73152" marR="73152" marT="73152" marB="73152" anchor="ctr">
+                    <a:lnL w="9525" cap="flat" cmpd="sng" algn="ctr">
+                      <a:solidFill>
+                        <a:srgbClr val="DCE3EC"/>
+                      </a:solidFill>
+                      <a:prstDash val="solid"/>
+                      <a:round/>
+                      <a:headEnd type="none" w="med" len="med"/>
+                      <a:tailEnd type="none" w="med" len="med"/>
+                    </a:lnL>
+                    <a:lnR w="9525" cap="flat" cmpd="sng" algn="ctr">
+                      <a:solidFill>
+                        <a:srgbClr val="DCE3EC"/>
+                      </a:solidFill>
+                      <a:prstDash val="solid"/>
+                      <a:round/>
+                      <a:headEnd type="none" w="med" len="med"/>
+                      <a:tailEnd type="none" w="med" len="med"/>
+                    </a:lnR>
+                    <a:lnT w="9525" cap="flat" cmpd="sng" algn="ctr">
+                      <a:solidFill>
+                        <a:srgbClr val="DCE3EC"/>
+                      </a:solidFill>
+                      <a:prstDash val="solid"/>
+                      <a:round/>
+                      <a:headEnd type="none" w="med" len="med"/>
+                      <a:tailEnd type="none" w="med" len="med"/>
+                    </a:lnT>
+                    <a:lnB w="9525" cap="flat" cmpd="sng" algn="ctr">
+                      <a:solidFill>
+                        <a:srgbClr val="DCE3EC"/>
+                      </a:solidFill>
+                      <a:prstDash val="solid"/>
+                      <a:round/>
+                      <a:headEnd type="none" w="med" len="med"/>
+                      <a:tailEnd type="none" w="med" len="med"/>
+                    </a:lnB>
+                    <a:solidFill>
+                      <a:srgbClr val="FFFFFF"/>
+                    </a:solidFill>
+                  </a:tcPr>
+                </a:tc>
+              </a:tr>
+              <a:tr h="502920">
+                <a:tc>
+                  <a:txBody>
+                    <a:bodyPr/>
+                    <a:lstStyle/>
+                    <a:p>
+                      <a:pPr indent="0" marL="0">
+                        <a:buNone/>
+                      </a:pPr>
+                      <a:r>
+                        <a:rPr lang="en-US" sz="1200" dirty="0">
+                          <a:solidFill>
+                            <a:srgbClr val="12182A"/>
+                          </a:solidFill>
+                          <a:latin typeface="Courier New" pitchFamily="34" charset="0"/>
+                          <a:ea typeface="Courier New" pitchFamily="34" charset="-122"/>
+                          <a:cs typeface="Courier New" pitchFamily="34" charset="-120"/>
+                        </a:rPr>
+                        <a:t>loop.js run &lt;plan&gt; --as &lt;body&gt;</a:t>
+                      </a:r>
+                      <a:endParaRPr lang="en-US" sz="1200" dirty="0">
+                        <a:latin typeface="Courier New" charset="0"/>
+                        <a:ea typeface="Courier New" charset="0"/>
+                        <a:cs typeface="Courier New" charset="0"/>
+                      </a:endParaRPr>
+                    </a:p>
+                  </a:txBody>
+                  <a:tcPr marL="73152" marR="73152" marT="73152" marB="73152" anchor="ctr">
+                    <a:lnL w="9525" cap="flat" cmpd="sng" algn="ctr">
+                      <a:solidFill>
+                        <a:srgbClr val="DCE3EC"/>
+                      </a:solidFill>
+                      <a:prstDash val="solid"/>
+                      <a:round/>
+                      <a:headEnd type="none" w="med" len="med"/>
+                      <a:tailEnd type="none" w="med" len="med"/>
+                    </a:lnL>
+                    <a:lnR w="9525" cap="flat" cmpd="sng" algn="ctr">
+                      <a:solidFill>
+                        <a:srgbClr val="DCE3EC"/>
+                      </a:solidFill>
+                      <a:prstDash val="solid"/>
+                      <a:round/>
+                      <a:headEnd type="none" w="med" len="med"/>
+                      <a:tailEnd type="none" w="med" len="med"/>
+                    </a:lnR>
+                    <a:lnT w="9525" cap="flat" cmpd="sng" algn="ctr">
+                      <a:solidFill>
+                        <a:srgbClr val="DCE3EC"/>
+                      </a:solidFill>
+                      <a:prstDash val="solid"/>
+                      <a:round/>
+                      <a:headEnd type="none" w="med" len="med"/>
+                      <a:tailEnd type="none" w="med" len="med"/>
+                    </a:lnT>
+                    <a:lnB w="9525" cap="flat" cmpd="sng" algn="ctr">
+                      <a:solidFill>
+                        <a:srgbClr val="DCE3EC"/>
+                      </a:solidFill>
+                      <a:prstDash val="solid"/>
+                      <a:round/>
+                      <a:headEnd type="none" w="med" len="med"/>
+                      <a:tailEnd type="none" w="med" len="med"/>
+                    </a:lnB>
+                    <a:solidFill>
+                      <a:srgbClr val="FFFFFF"/>
+                    </a:solidFill>
+                  </a:tcPr>
+                </a:tc>
+                <a:tc>
+                  <a:txBody>
+                    <a:bodyPr/>
+                    <a:lstStyle/>
+                    <a:p>
+                      <a:pPr indent="0" marL="0">
+                        <a:buNone/>
+                      </a:pPr>
+                      <a:r>
+                        <a:rPr lang="en-US" sz="1200" b="1" dirty="0">
+                          <a:solidFill>
+                            <a:srgbClr val="2695BD"/>
+                          </a:solidFill>
+                          <a:latin typeface="Courier New" pitchFamily="34" charset="0"/>
+                          <a:ea typeface="Courier New" pitchFamily="34" charset="-122"/>
+                          <a:cs typeface="Courier New" pitchFamily="34" charset="-120"/>
+                        </a:rPr>
+                        <a:t>isekai run · isekai (the terminal)</a:t>
+                      </a:r>
+                      <a:endParaRPr lang="en-US" sz="1200" dirty="0">
+                        <a:latin typeface="Courier New" charset="0"/>
+                        <a:ea typeface="Courier New" charset="0"/>
+                        <a:cs typeface="Courier New" charset="0"/>
+                      </a:endParaRPr>
+                    </a:p>
+                  </a:txBody>
+                  <a:tcPr marL="73152" marR="73152" marT="73152" marB="73152" anchor="ctr">
+                    <a:lnL w="9525" cap="flat" cmpd="sng" algn="ctr">
+                      <a:solidFill>
+                        <a:srgbClr val="DCE3EC"/>
+                      </a:solidFill>
+                      <a:prstDash val="solid"/>
+                      <a:round/>
+                      <a:headEnd type="none" w="med" len="med"/>
+                      <a:tailEnd type="none" w="med" len="med"/>
+                    </a:lnL>
+                    <a:lnR w="9525" cap="flat" cmpd="sng" algn="ctr">
+                      <a:solidFill>
+                        <a:srgbClr val="DCE3EC"/>
+                      </a:solidFill>
+                      <a:prstDash val="solid"/>
+                      <a:round/>
+                      <a:headEnd type="none" w="med" len="med"/>
+                      <a:tailEnd type="none" w="med" len="med"/>
+                    </a:lnR>
+                    <a:lnT w="9525" cap="flat" cmpd="sng" algn="ctr">
+                      <a:solidFill>
+                        <a:srgbClr val="DCE3EC"/>
+                      </a:solidFill>
+                      <a:prstDash val="solid"/>
+                      <a:round/>
+                      <a:headEnd type="none" w="med" len="med"/>
+                      <a:tailEnd type="none" w="med" len="med"/>
+                    </a:lnT>
+                    <a:lnB w="9525" cap="flat" cmpd="sng" algn="ctr">
+                      <a:solidFill>
+                        <a:srgbClr val="DCE3EC"/>
+                      </a:solidFill>
+                      <a:prstDash val="solid"/>
+                      <a:round/>
+                      <a:headEnd type="none" w="med" len="med"/>
+                      <a:tailEnd type="none" w="med" len="med"/>
+                    </a:lnB>
+                    <a:solidFill>
+                      <a:srgbClr val="FFFFFF"/>
+                    </a:solidFill>
+                  </a:tcPr>
+                </a:tc>
+                <a:tc>
+                  <a:txBody>
+                    <a:bodyPr/>
+                    <a:lstStyle/>
+                    <a:p>
+                      <a:pPr indent="0" marL="0">
+                        <a:buNone/>
+                      </a:pPr>
+                      <a:r>
+                        <a:rPr lang="en-US" sz="1200" dirty="0">
+                          <a:solidFill>
+                            <a:srgbClr val="3B4656"/>
+                          </a:solidFill>
+                          <a:latin typeface="Calibri" pitchFamily="34" charset="0"/>
+                          <a:ea typeface="Calibri" pitchFamily="34" charset="-122"/>
+                          <a:cs typeface="Calibri" pitchFamily="34" charset="-120"/>
+                        </a:rPr>
+                        <a:t>the six-beat loop with the gate, the guard and the sandbox in code</a:t>
+                      </a:r>
+                      <a:endParaRPr lang="en-US" sz="1200" dirty="0">
+                        <a:latin typeface="Calibri" charset="0"/>
+                        <a:ea typeface="Calibri" charset="0"/>
+                        <a:cs typeface="Calibri" charset="0"/>
+                      </a:endParaRPr>
+                    </a:p>
+                  </a:txBody>
+                  <a:tcPr marL="73152" marR="73152" marT="73152" marB="73152" anchor="ctr">
+                    <a:lnL w="9525" cap="flat" cmpd="sng" algn="ctr">
+                      <a:solidFill>
+                        <a:srgbClr val="DCE3EC"/>
+                      </a:solidFill>
+                      <a:prstDash val="solid"/>
+                      <a:round/>
+                      <a:headEnd type="none" w="med" len="med"/>
+                      <a:tailEnd type="none" w="med" len="med"/>
+                    </a:lnL>
+                    <a:lnR w="9525" cap="flat" cmpd="sng" algn="ctr">
+                      <a:solidFill>
+                        <a:srgbClr val="DCE3EC"/>
+                      </a:solidFill>
+                      <a:prstDash val="solid"/>
+                      <a:round/>
+                      <a:headEnd type="none" w="med" len="med"/>
+                      <a:tailEnd type="none" w="med" len="med"/>
+                    </a:lnR>
+                    <a:lnT w="9525" cap="flat" cmpd="sng" algn="ctr">
+                      <a:solidFill>
+                        <a:srgbClr val="DCE3EC"/>
+                      </a:solidFill>
+                      <a:prstDash val="solid"/>
+                      <a:round/>
+                      <a:headEnd type="none" w="med" len="med"/>
+                      <a:tailEnd type="none" w="med" len="med"/>
+                    </a:lnT>
+                    <a:lnB w="9525" cap="flat" cmpd="sng" algn="ctr">
+                      <a:solidFill>
+                        <a:srgbClr val="DCE3EC"/>
+                      </a:solidFill>
+                      <a:prstDash val="solid"/>
+                      <a:round/>
+                      <a:headEnd type="none" w="med" len="med"/>
+                      <a:tailEnd type="none" w="med" len="med"/>
+                    </a:lnB>
+                    <a:solidFill>
+                      <a:srgbClr val="FFFFFF"/>
+                    </a:solidFill>
+                  </a:tcPr>
+                </a:tc>
+              </a:tr>
+              <a:tr h="502920">
+                <a:tc>
+                  <a:txBody>
+                    <a:bodyPr/>
+                    <a:lstStyle/>
+                    <a:p>
+                      <a:pPr indent="0" marL="0">
+                        <a:buNone/>
+                      </a:pPr>
+                      <a:r>
+                        <a:rPr lang="en-US" sz="1200" dirty="0">
+                          <a:solidFill>
+                            <a:srgbClr val="12182A"/>
+                          </a:solidFill>
+                          <a:latin typeface="Courier New" pitchFamily="34" charset="0"/>
+                          <a:ea typeface="Courier New" pitchFamily="34" charset="-122"/>
+                          <a:cs typeface="Courier New" pitchFamily="34" charset="-120"/>
+                        </a:rPr>
+                        <a:t>tempest.js</a:t>
+                      </a:r>
+                      <a:endParaRPr lang="en-US" sz="1200" dirty="0">
+                        <a:latin typeface="Courier New" charset="0"/>
+                        <a:ea typeface="Courier New" charset="0"/>
+                        <a:cs typeface="Courier New" charset="0"/>
+                      </a:endParaRPr>
+                    </a:p>
+                  </a:txBody>
+                  <a:tcPr marL="73152" marR="73152" marT="73152" marB="73152" anchor="ctr">
+                    <a:lnL w="9525" cap="flat" cmpd="sng" algn="ctr">
+                      <a:solidFill>
+                        <a:srgbClr val="DCE3EC"/>
+                      </a:solidFill>
+                      <a:prstDash val="solid"/>
+                      <a:round/>
+                      <a:headEnd type="none" w="med" len="med"/>
+                      <a:tailEnd type="none" w="med" len="med"/>
+                    </a:lnL>
+                    <a:lnR w="9525" cap="flat" cmpd="sng" algn="ctr">
+                      <a:solidFill>
+                        <a:srgbClr val="DCE3EC"/>
+                      </a:solidFill>
+                      <a:prstDash val="solid"/>
+                      <a:round/>
+                      <a:headEnd type="none" w="med" len="med"/>
+                      <a:tailEnd type="none" w="med" len="med"/>
+                    </a:lnR>
+                    <a:lnT w="9525" cap="flat" cmpd="sng" algn="ctr">
+                      <a:solidFill>
+                        <a:srgbClr val="DCE3EC"/>
+                      </a:solidFill>
+                      <a:prstDash val="solid"/>
+                      <a:round/>
+                      <a:headEnd type="none" w="med" len="med"/>
+                      <a:tailEnd type="none" w="med" len="med"/>
+                    </a:lnT>
+                    <a:lnB w="9525" cap="flat" cmpd="sng" algn="ctr">
+                      <a:solidFill>
+                        <a:srgbClr val="DCE3EC"/>
+                      </a:solidFill>
+                      <a:prstDash val="solid"/>
+                      <a:round/>
+                      <a:headEnd type="none" w="med" len="med"/>
+                      <a:tailEnd type="none" w="med" len="med"/>
+                    </a:lnB>
+                    <a:solidFill>
+                      <a:srgbClr val="FFFFFF"/>
+                    </a:solidFill>
+                  </a:tcPr>
+                </a:tc>
+                <a:tc>
+                  <a:txBody>
+                    <a:bodyPr/>
+                    <a:lstStyle/>
+                    <a:p>
+                      <a:pPr indent="0" marL="0">
+                        <a:buNone/>
+                      </a:pPr>
+                      <a:r>
+                        <a:rPr lang="en-US" sz="1200" b="1" dirty="0">
+                          <a:solidFill>
+                            <a:srgbClr val="2695BD"/>
+                          </a:solidFill>
+                          <a:latin typeface="Courier New" pitchFamily="34" charset="0"/>
+                          <a:ea typeface="Courier New" pitchFamily="34" charset="-122"/>
+                          <a:cs typeface="Courier New" pitchFamily="34" charset="-120"/>
+                        </a:rPr>
+                        <a:t>isekai dash · isekai board</a:t>
+                      </a:r>
+                      <a:endParaRPr lang="en-US" sz="1200" dirty="0">
+                        <a:latin typeface="Courier New" charset="0"/>
+                        <a:ea typeface="Courier New" charset="0"/>
+                        <a:cs typeface="Courier New" charset="0"/>
+                      </a:endParaRPr>
+                    </a:p>
+                  </a:txBody>
+                  <a:tcPr marL="73152" marR="73152" marT="73152" marB="73152" anchor="ctr">
+                    <a:lnL w="9525" cap="flat" cmpd="sng" algn="ctr">
+                      <a:solidFill>
+                        <a:srgbClr val="DCE3EC"/>
+                      </a:solidFill>
+                      <a:prstDash val="solid"/>
+                      <a:round/>
+                      <a:headEnd type="none" w="med" len="med"/>
+                      <a:tailEnd type="none" w="med" len="med"/>
+                    </a:lnL>
+                    <a:lnR w="9525" cap="flat" cmpd="sng" algn="ctr">
+                      <a:solidFill>
+                        <a:srgbClr val="DCE3EC"/>
+                      </a:solidFill>
+                      <a:prstDash val="solid"/>
+                      <a:round/>
+                      <a:headEnd type="none" w="med" len="med"/>
+                      <a:tailEnd type="none" w="med" len="med"/>
+                    </a:lnR>
+                    <a:lnT w="9525" cap="flat" cmpd="sng" algn="ctr">
+                      <a:solidFill>
+                        <a:srgbClr val="DCE3EC"/>
+                      </a:solidFill>
+                      <a:prstDash val="solid"/>
+                      <a:round/>
+                      <a:headEnd type="none" w="med" len="med"/>
+                      <a:tailEnd type="none" w="med" len="med"/>
+                    </a:lnT>
+                    <a:lnB w="9525" cap="flat" cmpd="sng" algn="ctr">
+                      <a:solidFill>
+                        <a:srgbClr val="DCE3EC"/>
+                      </a:solidFill>
+                      <a:prstDash val="solid"/>
+                      <a:round/>
+                      <a:headEnd type="none" w="med" len="med"/>
+                      <a:tailEnd type="none" w="med" len="med"/>
+                    </a:lnB>
+                    <a:solidFill>
+                      <a:srgbClr val="FFFFFF"/>
+                    </a:solidFill>
+                  </a:tcPr>
+                </a:tc>
+                <a:tc>
+                  <a:txBody>
+                    <a:bodyPr/>
+                    <a:lstStyle/>
+                    <a:p>
+                      <a:pPr indent="0" marL="0">
+                        <a:buNone/>
+                      </a:pPr>
+                      <a:r>
+                        <a:rPr lang="en-US" sz="1200" dirty="0">
+                          <a:solidFill>
+                            <a:srgbClr val="3B4656"/>
+                          </a:solidFill>
+                          <a:latin typeface="Calibri" pitchFamily="34" charset="0"/>
+                          <a:ea typeface="Calibri" pitchFamily="34" charset="-122"/>
+                          <a:cs typeface="Calibri" pitchFamily="34" charset="-120"/>
+                        </a:rPr>
+                        <a:t>one page: the neural net in 2D and 3D, metrics, court, memory, toolbox, config</a:t>
+                      </a:r>
+                      <a:endParaRPr lang="en-US" sz="1200" dirty="0">
+                        <a:latin typeface="Calibri" charset="0"/>
+                        <a:ea typeface="Calibri" charset="0"/>
+                        <a:cs typeface="Calibri" charset="0"/>
+                      </a:endParaRPr>
+                    </a:p>
+                  </a:txBody>
+                  <a:tcPr marL="73152" marR="73152" marT="73152" marB="73152" anchor="ctr">
+                    <a:lnL w="9525" cap="flat" cmpd="sng" algn="ctr">
+                      <a:solidFill>
+                        <a:srgbClr val="DCE3EC"/>
+                      </a:solidFill>
+                      <a:prstDash val="solid"/>
+                      <a:round/>
+                      <a:headEnd type="none" w="med" len="med"/>
+                      <a:tailEnd type="none" w="med" len="med"/>
+                    </a:lnL>
+                    <a:lnR w="9525" cap="flat" cmpd="sng" algn="ctr">
+                      <a:solidFill>
+                        <a:srgbClr val="DCE3EC"/>
+                      </a:solidFill>
+                      <a:prstDash val="solid"/>
+                      <a:round/>
+                      <a:headEnd type="none" w="med" len="med"/>
+                      <a:tailEnd type="none" w="med" len="med"/>
+                    </a:lnR>
+                    <a:lnT w="9525" cap="flat" cmpd="sng" algn="ctr">
+                      <a:solidFill>
+                        <a:srgbClr val="DCE3EC"/>
+                      </a:solidFill>
+                      <a:prstDash val="solid"/>
+                      <a:round/>
+                      <a:headEnd type="none" w="med" len="med"/>
+                      <a:tailEnd type="none" w="med" len="med"/>
+                    </a:lnT>
+                    <a:lnB w="9525" cap="flat" cmpd="sng" algn="ctr">
+                      <a:solidFill>
+                        <a:srgbClr val="DCE3EC"/>
+                      </a:solidFill>
+                      <a:prstDash val="solid"/>
+                      <a:round/>
+                      <a:headEnd type="none" w="med" len="med"/>
+                      <a:tailEnd type="none" w="med" len="med"/>
+                    </a:lnB>
+                    <a:solidFill>
+                      <a:srgbClr val="FFFFFF"/>
+                    </a:solidFill>
+                  </a:tcPr>
+                </a:tc>
+              </a:tr>
+              <a:tr h="502920">
+                <a:tc>
+                  <a:txBody>
+                    <a:bodyPr/>
+                    <a:lstStyle/>
+                    <a:p>
+                      <a:pPr indent="0" marL="0">
+                        <a:buNone/>
+                      </a:pPr>
+                      <a:r>
+                        <a:rPr lang="en-US" sz="1200" dirty="0">
+                          <a:solidFill>
+                            <a:srgbClr val="12182A"/>
+                          </a:solidFill>
+                          <a:latin typeface="Courier New" pitchFamily="34" charset="0"/>
+                          <a:ea typeface="Courier New" pitchFamily="34" charset="-122"/>
+                          <a:cs typeface="Courier New" pitchFamily="34" charset="-120"/>
+                        </a:rPr>
+                        <a:t>the law in isekai.md</a:t>
+                      </a:r>
+                      <a:endParaRPr lang="en-US" sz="1200" dirty="0">
+                        <a:latin typeface="Courier New" charset="0"/>
+                        <a:ea typeface="Courier New" charset="0"/>
+                        <a:cs typeface="Courier New" charset="0"/>
+                      </a:endParaRPr>
+                    </a:p>
+                  </a:txBody>
+                  <a:tcPr marL="73152" marR="73152" marT="73152" marB="73152" anchor="ctr">
+                    <a:lnL w="9525" cap="flat" cmpd="sng" algn="ctr">
+                      <a:solidFill>
+                        <a:srgbClr val="DCE3EC"/>
+                      </a:solidFill>
+                      <a:prstDash val="solid"/>
+                      <a:round/>
+                      <a:headEnd type="none" w="med" len="med"/>
+                      <a:tailEnd type="none" w="med" len="med"/>
+                    </a:lnL>
+                    <a:lnR w="9525" cap="flat" cmpd="sng" algn="ctr">
+                      <a:solidFill>
+                        <a:srgbClr val="DCE3EC"/>
+                      </a:solidFill>
+                      <a:prstDash val="solid"/>
+                      <a:round/>
+                      <a:headEnd type="none" w="med" len="med"/>
+                      <a:tailEnd type="none" w="med" len="med"/>
+                    </a:lnR>
+                    <a:lnT w="9525" cap="flat" cmpd="sng" algn="ctr">
+                      <a:solidFill>
+                        <a:srgbClr val="DCE3EC"/>
+                      </a:solidFill>
+                      <a:prstDash val="solid"/>
+                      <a:round/>
+                      <a:headEnd type="none" w="med" len="med"/>
+                      <a:tailEnd type="none" w="med" len="med"/>
+                    </a:lnT>
+                    <a:lnB w="9525" cap="flat" cmpd="sng" algn="ctr">
+                      <a:solidFill>
+                        <a:srgbClr val="DCE3EC"/>
+                      </a:solidFill>
+                      <a:prstDash val="solid"/>
+                      <a:round/>
+                      <a:headEnd type="none" w="med" len="med"/>
+                      <a:tailEnd type="none" w="med" len="med"/>
+                    </a:lnB>
+                    <a:solidFill>
+                      <a:srgbClr val="FFFFFF"/>
+                    </a:solidFill>
+                  </a:tcPr>
+                </a:tc>
+                <a:tc>
+                  <a:txBody>
+                    <a:bodyPr/>
+                    <a:lstStyle/>
+                    <a:p>
+                      <a:pPr indent="0" marL="0">
+                        <a:buNone/>
+                      </a:pPr>
+                      <a:r>
+                        <a:rPr lang="en-US" sz="1200" b="1" dirty="0">
+                          <a:solidFill>
+                            <a:srgbClr val="2695BD"/>
+                          </a:solidFill>
+                          <a:latin typeface="Courier New" pitchFamily="34" charset="0"/>
+                          <a:ea typeface="Courier New" pitchFamily="34" charset="-122"/>
+                          <a:cs typeface="Courier New" pitchFamily="34" charset="-120"/>
+                        </a:rPr>
+                        <a:t>the law as code</a:t>
+                      </a:r>
+                      <a:endParaRPr lang="en-US" sz="1200" dirty="0">
+                        <a:latin typeface="Courier New" charset="0"/>
+                        <a:ea typeface="Courier New" charset="0"/>
+                        <a:cs typeface="Courier New" charset="0"/>
+                      </a:endParaRPr>
+                    </a:p>
+                  </a:txBody>
+                  <a:tcPr marL="73152" marR="73152" marT="73152" marB="73152" anchor="ctr">
+                    <a:lnL w="9525" cap="flat" cmpd="sng" algn="ctr">
+                      <a:solidFill>
+                        <a:srgbClr val="DCE3EC"/>
+                      </a:solidFill>
+                      <a:prstDash val="solid"/>
+                      <a:round/>
+                      <a:headEnd type="none" w="med" len="med"/>
+                      <a:tailEnd type="none" w="med" len="med"/>
+                    </a:lnL>
+                    <a:lnR w="9525" cap="flat" cmpd="sng" algn="ctr">
+                      <a:solidFill>
+                        <a:srgbClr val="DCE3EC"/>
+                      </a:solidFill>
+                      <a:prstDash val="solid"/>
+                      <a:round/>
+                      <a:headEnd type="none" w="med" len="med"/>
+                      <a:tailEnd type="none" w="med" len="med"/>
+                    </a:lnR>
+                    <a:lnT w="9525" cap="flat" cmpd="sng" algn="ctr">
+                      <a:solidFill>
+                        <a:srgbClr val="DCE3EC"/>
+                      </a:solidFill>
+                      <a:prstDash val="solid"/>
+                      <a:round/>
+                      <a:headEnd type="none" w="med" len="med"/>
+                      <a:tailEnd type="none" w="med" len="med"/>
+                    </a:lnT>
+                    <a:lnB w="9525" cap="flat" cmpd="sng" algn="ctr">
+                      <a:solidFill>
+                        <a:srgbClr val="DCE3EC"/>
+                      </a:solidFill>
+                      <a:prstDash val="solid"/>
+                      <a:round/>
+                      <a:headEnd type="none" w="med" len="med"/>
+                      <a:tailEnd type="none" w="med" len="med"/>
+                    </a:lnB>
+                    <a:solidFill>
+                      <a:srgbClr val="FFFFFF"/>
+                    </a:solidFill>
+                  </a:tcPr>
+                </a:tc>
+                <a:tc>
+                  <a:txBody>
+                    <a:bodyPr/>
+                    <a:lstStyle/>
+                    <a:p>
+                      <a:pPr indent="0" marL="0">
+                        <a:buNone/>
+                      </a:pPr>
+                      <a:r>
+                        <a:rPr lang="en-US" sz="1200" dirty="0">
+                          <a:solidFill>
+                            <a:srgbClr val="3B4656"/>
+                          </a:solidFill>
+                          <a:latin typeface="Calibri" pitchFamily="34" charset="0"/>
+                          <a:ea typeface="Calibri" pitchFamily="34" charset="-122"/>
+                          <a:cs typeface="Calibri" pitchFamily="34" charset="-120"/>
+                        </a:rPr>
+                        <a:t>the gate, human approval, territories, value, stress, evolution — off is always shown</a:t>
+                      </a:r>
+                      <a:endParaRPr lang="en-US" sz="1200" dirty="0">
+                        <a:latin typeface="Calibri" charset="0"/>
+                        <a:ea typeface="Calibri" charset="0"/>
+                        <a:cs typeface="Calibri" charset="0"/>
+                      </a:endParaRPr>
+                    </a:p>
+                  </a:txBody>
+                  <a:tcPr marL="73152" marR="73152" marT="73152" marB="73152" anchor="ctr">
+                    <a:lnL w="9525" cap="flat" cmpd="sng" algn="ctr">
+                      <a:solidFill>
+                        <a:srgbClr val="DCE3EC"/>
+                      </a:solidFill>
+                      <a:prstDash val="solid"/>
+                      <a:round/>
+                      <a:headEnd type="none" w="med" len="med"/>
+                      <a:tailEnd type="none" w="med" len="med"/>
+                    </a:lnL>
+                    <a:lnR w="9525" cap="flat" cmpd="sng" algn="ctr">
+                      <a:solidFill>
+                        <a:srgbClr val="DCE3EC"/>
+                      </a:solidFill>
+                      <a:prstDash val="solid"/>
+                      <a:round/>
+                      <a:headEnd type="none" w="med" len="med"/>
+                      <a:tailEnd type="none" w="med" len="med"/>
+                    </a:lnR>
+                    <a:lnT w="9525" cap="flat" cmpd="sng" algn="ctr">
+                      <a:solidFill>
+                        <a:srgbClr val="DCE3EC"/>
+                      </a:solidFill>
+                      <a:prstDash val="solid"/>
+                      <a:round/>
+                      <a:headEnd type="none" w="med" len="med"/>
+                      <a:tailEnd type="none" w="med" len="med"/>
+                    </a:lnT>
+                    <a:lnB w="9525" cap="flat" cmpd="sng" algn="ctr">
+                      <a:solidFill>
+                        <a:srgbClr val="DCE3EC"/>
+                      </a:solidFill>
+                      <a:prstDash val="solid"/>
+                      <a:round/>
+                      <a:headEnd type="none" w="med" len="med"/>
+                      <a:tailEnd type="none" w="med" len="med"/>
+                    </a:lnB>
+                    <a:solidFill>
+                      <a:srgbClr val="FFFFFF"/>
+                    </a:solidFill>
+                  </a:tcPr>
+                </a:tc>
+              </a:tr>
+              <a:tr h="502920">
+                <a:tc>
+                  <a:txBody>
+                    <a:bodyPr/>
+                    <a:lstStyle/>
+                    <a:p>
+                      <a:pPr indent="0" marL="0">
+                        <a:buNone/>
+                      </a:pPr>
+                      <a:r>
+                        <a:rPr lang="en-US" sz="1200" dirty="0">
+                          <a:solidFill>
+                            <a:srgbClr val="12182A"/>
+                          </a:solidFill>
+                          <a:latin typeface="Courier New" pitchFamily="34" charset="0"/>
+                          <a:ea typeface="Courier New" pitchFamily="34" charset="-122"/>
+                          <a:cs typeface="Courier New" pitchFamily="34" charset="-120"/>
+                        </a:rPr>
+                        <a:t>OpenCode / Claude Code sessions</a:t>
+                      </a:r>
+                      <a:endParaRPr lang="en-US" sz="1200" dirty="0">
+                        <a:latin typeface="Courier New" charset="0"/>
+                        <a:ea typeface="Courier New" charset="0"/>
+                        <a:cs typeface="Courier New" charset="0"/>
+                      </a:endParaRPr>
+                    </a:p>
+                  </a:txBody>
+                  <a:tcPr marL="73152" marR="73152" marT="73152" marB="73152" anchor="ctr">
+                    <a:lnL w="9525" cap="flat" cmpd="sng" algn="ctr">
+                      <a:solidFill>
+                        <a:srgbClr val="DCE3EC"/>
+                      </a:solidFill>
+                      <a:prstDash val="solid"/>
+                      <a:round/>
+                      <a:headEnd type="none" w="med" len="med"/>
+                      <a:tailEnd type="none" w="med" len="med"/>
+                    </a:lnL>
+                    <a:lnR w="9525" cap="flat" cmpd="sng" algn="ctr">
+                      <a:solidFill>
+                        <a:srgbClr val="DCE3EC"/>
+                      </a:solidFill>
+                      <a:prstDash val="solid"/>
+                      <a:round/>
+                      <a:headEnd type="none" w="med" len="med"/>
+                      <a:tailEnd type="none" w="med" len="med"/>
+                    </a:lnR>
+                    <a:lnT w="9525" cap="flat" cmpd="sng" algn="ctr">
+                      <a:solidFill>
+                        <a:srgbClr val="DCE3EC"/>
+                      </a:solidFill>
+                      <a:prstDash val="solid"/>
+                      <a:round/>
+                      <a:headEnd type="none" w="med" len="med"/>
+                      <a:tailEnd type="none" w="med" len="med"/>
+                    </a:lnT>
+                    <a:lnB w="9525" cap="flat" cmpd="sng" algn="ctr">
+                      <a:solidFill>
+                        <a:srgbClr val="DCE3EC"/>
+                      </a:solidFill>
+                      <a:prstDash val="solid"/>
+                      <a:round/>
+                      <a:headEnd type="none" w="med" len="med"/>
+                      <a:tailEnd type="none" w="med" len="med"/>
+                    </a:lnB>
+                    <a:solidFill>
+                      <a:srgbClr val="FFFFFF"/>
+                    </a:solidFill>
+                  </a:tcPr>
+                </a:tc>
+                <a:tc>
+                  <a:txBody>
+                    <a:bodyPr/>
+                    <a:lstStyle/>
+                    <a:p>
+                      <a:pPr indent="0" marL="0">
+                        <a:buNone/>
+                      </a:pPr>
+                      <a:r>
+                        <a:rPr lang="en-US" sz="1200" b="1" dirty="0">
+                          <a:solidFill>
+                            <a:srgbClr val="2695BD"/>
+                          </a:solidFill>
+                          <a:latin typeface="Courier New" pitchFamily="34" charset="0"/>
+                          <a:ea typeface="Courier New" pitchFamily="34" charset="-122"/>
+                          <a:cs typeface="Courier New" pitchFamily="34" charset="-120"/>
+                        </a:rPr>
+                        <a:t>isekai install --claude</a:t>
+                      </a:r>
+                      <a:endParaRPr lang="en-US" sz="1200" dirty="0">
+                        <a:latin typeface="Courier New" charset="0"/>
+                        <a:ea typeface="Courier New" charset="0"/>
+                        <a:cs typeface="Courier New" charset="0"/>
+                      </a:endParaRPr>
+                    </a:p>
+                  </a:txBody>
+                  <a:tcPr marL="73152" marR="73152" marT="73152" marB="73152" anchor="ctr">
+                    <a:lnL w="9525" cap="flat" cmpd="sng" algn="ctr">
+                      <a:solidFill>
+                        <a:srgbClr val="DCE3EC"/>
+                      </a:solidFill>
+                      <a:prstDash val="solid"/>
+                      <a:round/>
+                      <a:headEnd type="none" w="med" len="med"/>
+                      <a:tailEnd type="none" w="med" len="med"/>
+                    </a:lnL>
+                    <a:lnR w="9525" cap="flat" cmpd="sng" algn="ctr">
+                      <a:solidFill>
+                        <a:srgbClr val="DCE3EC"/>
+                      </a:solidFill>
+                      <a:prstDash val="solid"/>
+                      <a:round/>
+                      <a:headEnd type="none" w="med" len="med"/>
+                      <a:tailEnd type="none" w="med" len="med"/>
+                    </a:lnR>
+                    <a:lnT w="9525" cap="flat" cmpd="sng" algn="ctr">
+                      <a:solidFill>
+                        <a:srgbClr val="DCE3EC"/>
+                      </a:solidFill>
+                      <a:prstDash val="solid"/>
+                      <a:round/>
+                      <a:headEnd type="none" w="med" len="med"/>
+                      <a:tailEnd type="none" w="med" len="med"/>
+                    </a:lnT>
+                    <a:lnB w="9525" cap="flat" cmpd="sng" algn="ctr">
+                      <a:solidFill>
+                        <a:srgbClr val="DCE3EC"/>
+                      </a:solidFill>
+                      <a:prstDash val="solid"/>
+                      <a:round/>
+                      <a:headEnd type="none" w="med" len="med"/>
+                      <a:tailEnd type="none" w="med" len="med"/>
+                    </a:lnB>
+                    <a:solidFill>
+                      <a:srgbClr val="FFFFFF"/>
+                    </a:solidFill>
+                  </a:tcPr>
+                </a:tc>
+                <a:tc>
+                  <a:txBody>
+                    <a:bodyPr/>
+                    <a:lstStyle/>
+                    <a:p>
+                      <a:pPr indent="0" marL="0">
+                        <a:buNone/>
+                      </a:pPr>
+                      <a:r>
+                        <a:rPr lang="en-US" sz="1200" dirty="0">
+                          <a:solidFill>
+                            <a:srgbClr val="3B4656"/>
+                          </a:solidFill>
+                          <a:latin typeface="Calibri" pitchFamily="34" charset="0"/>
+                          <a:ea typeface="Calibri" pitchFamily="34" charset="-122"/>
+                          <a:cs typeface="Calibri" pitchFamily="34" charset="-120"/>
+                        </a:rPr>
+                        <a:t>the binary's law inside Claude Code through its hooks</a:t>
+                      </a:r>
+                      <a:endParaRPr lang="en-US" sz="1200" dirty="0">
+                        <a:latin typeface="Calibri" charset="0"/>
+                        <a:ea typeface="Calibri" charset="0"/>
+                        <a:cs typeface="Calibri" charset="0"/>
+                      </a:endParaRPr>
+                    </a:p>
+                  </a:txBody>
+                  <a:tcPr marL="73152" marR="73152" marT="73152" marB="73152" anchor="ctr">
+                    <a:lnL w="9525" cap="flat" cmpd="sng" algn="ctr">
+                      <a:solidFill>
+                        <a:srgbClr val="DCE3EC"/>
+                      </a:solidFill>
+                      <a:prstDash val="solid"/>
+                      <a:round/>
+                      <a:headEnd type="none" w="med" len="med"/>
+                      <a:tailEnd type="none" w="med" len="med"/>
+                    </a:lnL>
+                    <a:lnR w="9525" cap="flat" cmpd="sng" algn="ctr">
+                      <a:solidFill>
+                        <a:srgbClr val="DCE3EC"/>
+                      </a:solidFill>
+                      <a:prstDash val="solid"/>
+                      <a:round/>
+                      <a:headEnd type="none" w="med" len="med"/>
+                      <a:tailEnd type="none" w="med" len="med"/>
+                    </a:lnR>
+                    <a:lnT w="9525" cap="flat" cmpd="sng" algn="ctr">
+                      <a:solidFill>
+                        <a:srgbClr val="DCE3EC"/>
+                      </a:solidFill>
+                      <a:prstDash val="solid"/>
+                      <a:round/>
+                      <a:headEnd type="none" w="med" len="med"/>
+                      <a:tailEnd type="none" w="med" len="med"/>
+                    </a:lnT>
+                    <a:lnB w="9525" cap="flat" cmpd="sng" algn="ctr">
+                      <a:solidFill>
+                        <a:srgbClr val="DCE3EC"/>
+                      </a:solidFill>
+                      <a:prstDash val="solid"/>
+                      <a:round/>
+                      <a:headEnd type="none" w="med" len="med"/>
+                      <a:tailEnd type="none" w="med" len="med"/>
+                    </a:lnB>
+                    <a:solidFill>
+                      <a:srgbClr val="FFFFFF"/>
+                    </a:solidFill>
+                  </a:tcPr>
+                </a:tc>
+              </a:tr>
+            </a:tbl>
+          </a:graphicData>
+        </a:graphic>
+      </p:graphicFrame>
+      <p:sp>
+        <p:nvSpPr>
+          <p:cNvPr id="5" name="Text 2"/>
+          <p:cNvSpPr txBox="1"/>
+          <p:nvPr/>
+        </p:nvSpPr>
+        <p:spPr>
+          <a:xfrm>
+            <a:off x="457200" y="6400800"/>
+            <a:ext cx="7315200" cy="274320"/>
+          </a:xfrm>
+          <a:prstGeom prst="rect">
+            <a:avLst/>
+          </a:prstGeom>
+          <a:noFill/>
+          <a:ln/>
+        </p:spPr>
+        <p:txBody>
+          <a:bodyPr wrap="square" lIns="0" tIns="0" rIns="0" bIns="0" rtlCol="0" anchor="ctr"/>
+          <a:lstStyle/>
+          <a:p>
+            <a:pPr indent="0" marL="0">
+              <a:buNone/>
+            </a:pPr>
+            <a:r>
+              <a:rPr lang="en-US" sz="900" spc="100" kern="0" dirty="0">
+                <a:solidFill>
+                  <a:srgbClr val="6B7A90"/>
+                </a:solidFill>
+                <a:latin typeface="Calibri" pitchFamily="34" charset="0"/>
+                <a:ea typeface="Calibri" pitchFamily="34" charset="-122"/>
+                <a:cs typeface="Calibri" pitchFamily="34" charset="-120"/>
+              </a:rPr>
+              <a:t>ISEKAI ⋄ A CONVENTION FOR LIVING WORLDS</a:t>
+            </a:r>
+            <a:endParaRPr lang="en-US" sz="900" dirty="0"/>
+          </a:p>
+        </p:txBody>
+      </p:sp>
+    </p:spTree>
+  </p:cSld>
+  <p:clrMapOvr>
+    <a:masterClrMapping/>
+  </p:clrMapOvr>
+</p:sld>
+</file>
+
+<file path=ppt/slides/slide21.xml><?xml version="1.0" encoding="utf-8"?>
+<p:sld xmlns:a="http://schemas.openxmlformats.org/drawingml/2006/main" xmlns:r="http://schemas.openxmlformats.org/officeDocument/2006/relationships" xmlns:p="http://schemas.openxmlformats.org/presentationml/2006/main">
+  <p:cSld name="Slide 21">
     <p:bg>
       <p:bgPr>
         <a:solidFill>
@@ -13474,7 +15384,7 @@
                 <a:ea typeface="Courier New" pitchFamily="34" charset="-122"/>
                 <a:cs typeface="Courier New" pitchFamily="34" charset="-120"/>
               </a:rPr>
-              <a:t>/isekai</a:t>
+              <a:t>isekai init</a:t>
             </a:r>
             <a:endParaRPr lang="en-US" sz="5600" dirty="0"/>
           </a:p>
